--- a/AgentsFromScratch/leadership.pptx
+++ b/AgentsFromScratch/leadership.pptx
@@ -8,6 +8,8 @@
     <p:sldId id="256" r:id="rId7"/>
     <p:sldId id="257" r:id="rId8"/>
     <p:sldId id="258" r:id="rId9"/>
+    <p:sldId id="259" r:id="rId10"/>
+    <p:sldId id="260" r:id="rId11"/>
   </p:sldIdLst>
   <p:sldSz cx="9144000" cy="6858000" type="screen4x3"/>
   <p:notesSz cx="6858000" cy="9144000"/>
@@ -3092,58 +3094,40 @@
       <p:grpSpPr/>
       <p:sp>
         <p:nvSpPr>
-          <p:cNvPr id="2" name="TextBox 1"/>
-          <p:cNvSpPr txBox="1"/>
-          <p:nvPr/>
-        </p:nvSpPr>
-        <p:spPr>
-          <a:xfrm>
-            <a:off x="100" y="100"/>
-            <a:ext cx="300" cy="50"/>
-          </a:xfrm>
-          <a:prstGeom prst="rect">
-            <a:avLst/>
-          </a:prstGeom>
-          <a:noFill/>
-        </p:spPr>
-        <p:txBody>
-          <a:bodyPr wrap="none">
-            <a:spAutoFit/>
-          </a:bodyPr>
-          <a:lstStyle/>
-          <a:p>
-            <a:r>
-              <a:t>Leadership</a:t>
-            </a:r>
-          </a:p>
-        </p:txBody>
-      </p:sp>
-      <p:sp>
-        <p:nvSpPr>
-          <p:cNvPr id="3" name="TextBox 2"/>
-          <p:cNvSpPr txBox="1"/>
-          <p:nvPr/>
-        </p:nvSpPr>
-        <p:spPr>
-          <a:xfrm>
-            <a:off x="100" y="150"/>
-            <a:ext cx="300" cy="50"/>
-          </a:xfrm>
-          <a:prstGeom prst="rect">
-            <a:avLst/>
-          </a:prstGeom>
-          <a:noFill/>
-        </p:spPr>
-        <p:txBody>
-          <a:bodyPr wrap="none">
-            <a:spAutoFit/>
-          </a:bodyPr>
-          <a:lstStyle/>
-          <a:p>
-            <a:r>
-              <a:t> Leaders have a strong sense of vision and are able to inspire and motivate others to work towards a common goal. They have the ability to think strategically and make informed decisions. </a:t>
-            </a:r>
-          </a:p>
+          <p:cNvPr id="2" name="Title 1"/>
+          <p:cNvSpPr>
+            <a:spLocks noGrp="1"/>
+          </p:cNvSpPr>
+          <p:nvPr>
+            <p:ph type="ctrTitle"/>
+          </p:nvPr>
+        </p:nvSpPr>
+        <p:spPr/>
+        <p:txBody>
+          <a:bodyPr/>
+          <a:lstStyle/>
+          <a:p>
+            <a:r>
+              <a:t>Best Forms of Leadership</a:t>
+            </a:r>
+          </a:p>
+        </p:txBody>
+      </p:sp>
+      <p:sp>
+        <p:nvSpPr>
+          <p:cNvPr id="3" name="Subtitle 2"/>
+          <p:cNvSpPr>
+            <a:spLocks noGrp="1"/>
+          </p:cNvSpPr>
+          <p:nvPr>
+            <p:ph type="subTitle" idx="1"/>
+          </p:nvPr>
+        </p:nvSpPr>
+        <p:spPr/>
+        <p:txBody>
+          <a:bodyPr/>
+          <a:lstStyle/>
+          <a:p/>
         </p:txBody>
       </p:sp>
     </p:spTree>
@@ -3166,24 +3150,17 @@
       <p:grpSpPr/>
       <p:sp>
         <p:nvSpPr>
-          <p:cNvPr id="2" name="TextBox 1"/>
-          <p:cNvSpPr txBox="1"/>
-          <p:nvPr/>
-        </p:nvSpPr>
-        <p:spPr>
-          <a:xfrm>
-            <a:off x="100" y="100"/>
-            <a:ext cx="300" cy="50"/>
-          </a:xfrm>
-          <a:prstGeom prst="rect">
-            <a:avLst/>
-          </a:prstGeom>
-          <a:noFill/>
-        </p:spPr>
-        <p:txBody>
-          <a:bodyPr wrap="none">
-            <a:spAutoFit/>
-          </a:bodyPr>
+          <p:cNvPr id="2" name="Title 1"/>
+          <p:cNvSpPr>
+            <a:spLocks noGrp="1"/>
+          </p:cNvSpPr>
+          <p:nvPr>
+            <p:ph type="title"/>
+          </p:nvPr>
+        </p:nvSpPr>
+        <p:spPr/>
+        <p:txBody>
+          <a:bodyPr/>
           <a:lstStyle/>
           <a:p>
             <a:r>
@@ -3194,28 +3171,21 @@
       </p:sp>
       <p:sp>
         <p:nvSpPr>
-          <p:cNvPr id="3" name="TextBox 2"/>
-          <p:cNvSpPr txBox="1"/>
-          <p:nvPr/>
-        </p:nvSpPr>
-        <p:spPr>
-          <a:xfrm>
-            <a:off x="100" y="150"/>
-            <a:ext cx="300" cy="50"/>
-          </a:xfrm>
-          <a:prstGeom prst="rect">
-            <a:avLst/>
-          </a:prstGeom>
-          <a:noFill/>
-        </p:spPr>
-        <p:txBody>
-          <a:bodyPr wrap="none">
-            <a:spAutoFit/>
-          </a:bodyPr>
-          <a:lstStyle/>
-          <a:p>
-            <a:r>
-              <a:t>Transformational leaders inspire and motivate others to achieve a shared vision. They have a strong sense of empathy and are able to build trust with their team. </a:t>
+          <p:cNvPr id="3" name="Content Placeholder 2"/>
+          <p:cNvSpPr>
+            <a:spLocks noGrp="1"/>
+          </p:cNvSpPr>
+          <p:nvPr>
+            <p:ph idx="1"/>
+          </p:nvPr>
+        </p:nvSpPr>
+        <p:spPr/>
+        <p:txBody>
+          <a:bodyPr/>
+          <a:lstStyle/>
+          <a:p>
+            <a:r>
+              <a:t>Inspire and motivate followers to achieve great things. Focus on vision, empowerment, and ethical behavior.</a:t>
             </a:r>
           </a:p>
         </p:txBody>
@@ -3240,24 +3210,17 @@
       <p:grpSpPr/>
       <p:sp>
         <p:nvSpPr>
-          <p:cNvPr id="2" name="TextBox 1"/>
-          <p:cNvSpPr txBox="1"/>
-          <p:nvPr/>
-        </p:nvSpPr>
-        <p:spPr>
-          <a:xfrm>
-            <a:off x="100" y="100"/>
-            <a:ext cx="300" cy="50"/>
-          </a:xfrm>
-          <a:prstGeom prst="rect">
-            <a:avLst/>
-          </a:prstGeom>
-          <a:noFill/>
-        </p:spPr>
-        <p:txBody>
-          <a:bodyPr wrap="none">
-            <a:spAutoFit/>
-          </a:bodyPr>
+          <p:cNvPr id="2" name="Title 1"/>
+          <p:cNvSpPr>
+            <a:spLocks noGrp="1"/>
+          </p:cNvSpPr>
+          <p:nvPr>
+            <p:ph type="title"/>
+          </p:nvPr>
+        </p:nvSpPr>
+        <p:spPr/>
+        <p:txBody>
+          <a:bodyPr/>
           <a:lstStyle/>
           <a:p>
             <a:r>
@@ -3268,28 +3231,141 @@
       </p:sp>
       <p:sp>
         <p:nvSpPr>
-          <p:cNvPr id="3" name="TextBox 2"/>
-          <p:cNvSpPr txBox="1"/>
-          <p:nvPr/>
-        </p:nvSpPr>
-        <p:spPr>
-          <a:xfrm>
-            <a:off x="100" y="150"/>
-            <a:ext cx="300" cy="50"/>
-          </a:xfrm>
-          <a:prstGeom prst="rect">
-            <a:avLst/>
-          </a:prstGeom>
-          <a:noFill/>
-        </p:spPr>
-        <p:txBody>
-          <a:bodyPr wrap="none">
-            <a:spAutoFit/>
-          </a:bodyPr>
-          <a:lstStyle/>
-          <a:p>
-            <a:r>
-              <a:t>Servant leaders prioritize the needs of their team and focus on building a positive work environment. They are humble and empathetic, and lead by example. </a:t>
+          <p:cNvPr id="3" name="Content Placeholder 2"/>
+          <p:cNvSpPr>
+            <a:spLocks noGrp="1"/>
+          </p:cNvSpPr>
+          <p:nvPr>
+            <p:ph idx="1"/>
+          </p:nvPr>
+        </p:nvSpPr>
+        <p:spPr/>
+        <p:txBody>
+          <a:bodyPr/>
+          <a:lstStyle/>
+          <a:p>
+            <a:r>
+              <a:t>Prioritize the needs of others, empower them, and build strong relationships. Focus on service, empathy, and stewardship.</a:t>
+            </a:r>
+          </a:p>
+        </p:txBody>
+      </p:sp>
+    </p:spTree>
+  </p:cSld>
+  <p:clrMapOvr>
+    <a:masterClrMapping/>
+  </p:clrMapOvr>
+</p:sld>
+</file>
+
+<file path=ppt/slides/slide4.xml><?xml version="1.0" encoding="utf-8"?>
+<p:sld xmlns:a="http://schemas.openxmlformats.org/drawingml/2006/main" xmlns:p="http://schemas.openxmlformats.org/presentationml/2006/main" xmlns:r="http://schemas.openxmlformats.org/officeDocument/2006/relationships">
+  <p:cSld>
+    <p:spTree>
+      <p:nvGrpSpPr>
+        <p:cNvPr id="1" name=""/>
+        <p:cNvGrpSpPr/>
+        <p:nvPr/>
+      </p:nvGrpSpPr>
+      <p:grpSpPr/>
+      <p:sp>
+        <p:nvSpPr>
+          <p:cNvPr id="2" name="Title 1"/>
+          <p:cNvSpPr>
+            <a:spLocks noGrp="1"/>
+          </p:cNvSpPr>
+          <p:nvPr>
+            <p:ph type="title"/>
+          </p:nvPr>
+        </p:nvSpPr>
+        <p:spPr/>
+        <p:txBody>
+          <a:bodyPr/>
+          <a:lstStyle/>
+          <a:p>
+            <a:r>
+              <a:t>Democratic Leadership</a:t>
+            </a:r>
+          </a:p>
+        </p:txBody>
+      </p:sp>
+      <p:sp>
+        <p:nvSpPr>
+          <p:cNvPr id="3" name="Content Placeholder 2"/>
+          <p:cNvSpPr>
+            <a:spLocks noGrp="1"/>
+          </p:cNvSpPr>
+          <p:nvPr>
+            <p:ph idx="1"/>
+          </p:nvPr>
+        </p:nvSpPr>
+        <p:spPr/>
+        <p:txBody>
+          <a:bodyPr/>
+          <a:lstStyle/>
+          <a:p>
+            <a:r>
+              <a:t>Involve followers in decision-making, encourage participation, and value diverse perspectives. Focus on collaboration, consensus building, and shared responsibility.</a:t>
+            </a:r>
+          </a:p>
+        </p:txBody>
+      </p:sp>
+    </p:spTree>
+  </p:cSld>
+  <p:clrMapOvr>
+    <a:masterClrMapping/>
+  </p:clrMapOvr>
+</p:sld>
+</file>
+
+<file path=ppt/slides/slide5.xml><?xml version="1.0" encoding="utf-8"?>
+<p:sld xmlns:a="http://schemas.openxmlformats.org/drawingml/2006/main" xmlns:p="http://schemas.openxmlformats.org/presentationml/2006/main" xmlns:r="http://schemas.openxmlformats.org/officeDocument/2006/relationships">
+  <p:cSld>
+    <p:spTree>
+      <p:nvGrpSpPr>
+        <p:cNvPr id="1" name=""/>
+        <p:cNvGrpSpPr/>
+        <p:nvPr/>
+      </p:nvGrpSpPr>
+      <p:grpSpPr/>
+      <p:sp>
+        <p:nvSpPr>
+          <p:cNvPr id="2" name="Title 1"/>
+          <p:cNvSpPr>
+            <a:spLocks noGrp="1"/>
+          </p:cNvSpPr>
+          <p:nvPr>
+            <p:ph type="title"/>
+          </p:nvPr>
+        </p:nvSpPr>
+        <p:spPr/>
+        <p:txBody>
+          <a:bodyPr/>
+          <a:lstStyle/>
+          <a:p>
+            <a:r>
+              <a:t>Strategic Leadership</a:t>
+            </a:r>
+          </a:p>
+        </p:txBody>
+      </p:sp>
+      <p:sp>
+        <p:nvSpPr>
+          <p:cNvPr id="3" name="Content Placeholder 2"/>
+          <p:cNvSpPr>
+            <a:spLocks noGrp="1"/>
+          </p:cNvSpPr>
+          <p:nvPr>
+            <p:ph idx="1"/>
+          </p:nvPr>
+        </p:nvSpPr>
+        <p:spPr/>
+        <p:txBody>
+          <a:bodyPr/>
+          <a:lstStyle/>
+          <a:p>
+            <a:r>
+              <a:t>Set a clear vision, develop strategies to achieve goals, and effectively allocate resources. Focus on planning, execution, and results.</a:t>
             </a:r>
           </a:p>
         </p:txBody>
